--- a/Class Materials/PPT/Module 2B XML.pptx
+++ b/Class Materials/PPT/Module 2B XML.pptx
@@ -235,7 +235,7 @@
           <a:p>
             <a:fld id="{B0C24494-34C8-4B85-95EC-EFB8BC02FE7F}" type="datetimeFigureOut">
               <a:rPr lang="en-US" smtClean="0"/>
-              <a:t>8/6/2024</a:t>
+              <a:t>10/24/2025</a:t>
             </a:fld>
             <a:endParaRPr lang="en-US"/>
           </a:p>
@@ -401,7 +401,7 @@
           <a:p>
             <a:fld id="{96911B5A-781F-4560-A1CC-D59FB8C1A7F6}" type="datetimeFigureOut">
               <a:rPr lang="en-US" smtClean="0"/>
-              <a:t>8/6/2024</a:t>
+              <a:t>10/24/2025</a:t>
             </a:fld>
             <a:endParaRPr lang="en-US"/>
           </a:p>
@@ -936,7 +936,7 @@
           <a:p>
             <a:fld id="{AAAC5A33-9226-4376-B906-4B0C7752F3F3}" type="datetime1">
               <a:rPr lang="en-US" smtClean="0"/>
-              <a:t>8/6/2024</a:t>
+              <a:t>10/24/2025</a:t>
             </a:fld>
             <a:endParaRPr lang="en-US"/>
           </a:p>
@@ -1178,7 +1178,7 @@
           <a:p>
             <a:fld id="{B95CB118-406F-4C5F-971C-D01C2075A44F}" type="datetime1">
               <a:rPr lang="en-US" smtClean="0"/>
-              <a:t>8/6/2024</a:t>
+              <a:t>10/24/2025</a:t>
             </a:fld>
             <a:endParaRPr lang="en-US"/>
           </a:p>
@@ -1372,7 +1372,7 @@
           <a:p>
             <a:fld id="{5891AAB5-29E3-454A-8B27-82FAF9AA8D2C}" type="datetime1">
               <a:rPr lang="en-US" smtClean="0"/>
-              <a:t>8/6/2024</a:t>
+              <a:t>10/24/2025</a:t>
             </a:fld>
             <a:endParaRPr lang="en-US"/>
           </a:p>
@@ -1556,7 +1556,7 @@
           <a:p>
             <a:fld id="{724AADF8-674F-4E37-AEDC-92DD750D1173}" type="datetime1">
               <a:rPr lang="en-US" smtClean="0"/>
-              <a:t>8/6/2024</a:t>
+              <a:t>10/24/2025</a:t>
             </a:fld>
             <a:endParaRPr lang="en-US"/>
           </a:p>
@@ -1817,7 +1817,7 @@
           <a:p>
             <a:fld id="{20B81AED-7B70-496A-A12E-823AEFD5C0BB}" type="datetime1">
               <a:rPr lang="en-US" smtClean="0"/>
-              <a:t>8/6/2024</a:t>
+              <a:t>10/24/2025</a:t>
             </a:fld>
             <a:endParaRPr lang="en-US"/>
           </a:p>
@@ -2118,7 +2118,7 @@
           <a:p>
             <a:fld id="{827E8D6D-3A91-4BD0-9248-7F8660A8F09B}" type="datetime1">
               <a:rPr lang="en-US" smtClean="0"/>
-              <a:t>8/6/2024</a:t>
+              <a:t>10/24/2025</a:t>
             </a:fld>
             <a:endParaRPr lang="en-US"/>
           </a:p>
@@ -2553,7 +2553,7 @@
           <a:p>
             <a:fld id="{E5BBFFE7-CAC9-497A-AAF7-C2922785C649}" type="datetime1">
               <a:rPr lang="en-US" smtClean="0"/>
-              <a:t>8/6/2024</a:t>
+              <a:t>10/24/2025</a:t>
             </a:fld>
             <a:endParaRPr lang="en-US"/>
           </a:p>
@@ -2686,7 +2686,7 @@
           <a:p>
             <a:fld id="{D1E3908D-C920-449F-B38A-64963E2B48E8}" type="datetime1">
               <a:rPr lang="en-US" smtClean="0"/>
-              <a:t>8/6/2024</a:t>
+              <a:t>10/24/2025</a:t>
             </a:fld>
             <a:endParaRPr lang="en-US"/>
           </a:p>
@@ -2797,7 +2797,7 @@
           <a:p>
             <a:fld id="{5EFBD9F8-5A17-427A-BB04-9A98943668E8}" type="datetime1">
               <a:rPr lang="en-US" smtClean="0"/>
-              <a:t>8/6/2024</a:t>
+              <a:t>10/24/2025</a:t>
             </a:fld>
             <a:endParaRPr lang="en-US"/>
           </a:p>
@@ -3088,7 +3088,7 @@
           <a:p>
             <a:fld id="{312DEC6A-E0EE-4392-B80F-E55C5E1190FC}" type="datetime1">
               <a:rPr lang="en-US" smtClean="0"/>
-              <a:t>8/6/2024</a:t>
+              <a:t>10/24/2025</a:t>
             </a:fld>
             <a:endParaRPr lang="en-US"/>
           </a:p>
@@ -3362,7 +3362,7 @@
           <a:p>
             <a:fld id="{C2A688D0-D902-44CB-BD46-3F634243F429}" type="datetime1">
               <a:rPr lang="en-US" smtClean="0"/>
-              <a:t>8/6/2024</a:t>
+              <a:t>10/24/2025</a:t>
             </a:fld>
             <a:endParaRPr lang="en-US"/>
           </a:p>
@@ -3636,7 +3636,7 @@
           <a:p>
             <a:fld id="{BE81075A-DF51-44C7-B71F-F968B902E6D0}" type="datetime1">
               <a:rPr lang="en-US" smtClean="0"/>
-              <a:t>8/6/2024</a:t>
+              <a:t>10/24/2025</a:t>
             </a:fld>
             <a:endParaRPr lang="en-US"/>
           </a:p>
@@ -4299,7 +4299,7 @@
                 <a14:useLocalDpi xmlns:a14="http://schemas.microsoft.com/office/drawing/2010/main" val="0"/>
               </a:ext>
               <a:ext uri="{96DAC541-7B7A-43D3-8B79-37D633B846F1}">
-                <asvg:svgBlip xmlns:asvg="http://schemas.microsoft.com/office/drawing/2016/SVG/main" xmlns="" r:embed="rId5"/>
+                <asvg:svgBlip xmlns="" xmlns:asvg="http://schemas.microsoft.com/office/drawing/2016/SVG/main" r:embed="rId5"/>
               </a:ext>
             </a:extLst>
           </a:blip>
@@ -4513,16 +4513,28 @@
           </a:lstStyle>
           <a:p>
             <a:r>
+              <a:rPr lang="en-IN" sz="2800" smtClean="0">
+                <a:hlinkClick r:id="rId6">
+                  <a:extLst>
+                    <a:ext uri="{A12FA001-AC4F-418D-AE19-62706E023703}">
+                      <ahyp:hlinkClr xmlns="" xmlns:ahyp="http://schemas.microsoft.com/office/drawing/2018/hyperlinkcolor" val="tx"/>
+                    </a:ext>
+                  </a:extLst>
+                </a:hlinkClick>
+              </a:rPr>
+              <a:t>CSE2259 </a:t>
+            </a:r>
+            <a:r>
               <a:rPr lang="en-IN" sz="2800" dirty="0">
                 <a:hlinkClick r:id="rId6">
                   <a:extLst>
                     <a:ext uri="{A12FA001-AC4F-418D-AE19-62706E023703}">
-                      <ahyp:hlinkClr xmlns:ahyp="http://schemas.microsoft.com/office/drawing/2018/hyperlinkcolor" xmlns="" val="tx"/>
+                      <ahyp:hlinkClr xmlns="" xmlns:ahyp="http://schemas.microsoft.com/office/drawing/2018/hyperlinkcolor" val="tx"/>
                     </a:ext>
                   </a:extLst>
                 </a:hlinkClick>
               </a:rPr>
-              <a:t>CSE2067 - Web Technology</a:t>
+              <a:t>- Web Technology</a:t>
             </a:r>
           </a:p>
           <a:p>
@@ -10468,21 +10480,6 @@
 </file>
 
 <file path=customXml/item1.xml><?xml version="1.0" encoding="utf-8"?>
-<p:properties xmlns:p="http://schemas.microsoft.com/office/2006/metadata/properties" xmlns:xsi="http://www.w3.org/2001/XMLSchema-instance" xmlns:pc="http://schemas.microsoft.com/office/infopath/2007/PartnerControls">
-  <documentManagement/>
-</p:properties>
-</file>
-
-<file path=customXml/item2.xml><?xml version="1.0" encoding="utf-8"?>
-<?mso-contentType ?>
-<FormTemplates xmlns="http://schemas.microsoft.com/sharepoint/v3/contenttype/forms">
-  <Display>DocumentLibraryForm</Display>
-  <Edit>DocumentLibraryForm</Edit>
-  <New>DocumentLibraryForm</New>
-</FormTemplates>
-</file>
-
-<file path=customXml/item3.xml><?xml version="1.0" encoding="utf-8"?>
 <ct:contentTypeSchema xmlns:ct="http://schemas.microsoft.com/office/2006/metadata/contentType" xmlns:ma="http://schemas.microsoft.com/office/2006/metadata/properties/metaAttributes" ct:_="" ma:_="" ma:contentTypeName="Document" ma:contentTypeID="0x010100888FA4A4A974D54E8EF3CF1F8921BA09" ma:contentTypeVersion="3" ma:contentTypeDescription="Create a new document." ma:contentTypeScope="" ma:versionID="d7ae88f0a332b40e5260dcdf0b06131e">
   <xsd:schema xmlns:xsd="http://www.w3.org/2001/XMLSchema" xmlns:xs="http://www.w3.org/2001/XMLSchema" xmlns:p="http://schemas.microsoft.com/office/2006/metadata/properties" xmlns:ns2="c1ac3b6e-c3ea-4cbf-a06a-c0c6c6a25c6e" targetNamespace="http://schemas.microsoft.com/office/2006/metadata/properties" ma:root="true" ma:fieldsID="e38513e3120375bb0272613386818226" ns2:_="">
     <xsd:import namespace="c1ac3b6e-c3ea-4cbf-a06a-c0c6c6a25c6e"/>
@@ -10620,11 +10617,35 @@
 </ct:contentTypeSchema>
 </file>
 
+<file path=customXml/item2.xml><?xml version="1.0" encoding="utf-8"?>
+<?mso-contentType ?>
+<FormTemplates xmlns="http://schemas.microsoft.com/sharepoint/v3/contenttype/forms">
+  <Display>DocumentLibraryForm</Display>
+  <Edit>DocumentLibraryForm</Edit>
+  <New>DocumentLibraryForm</New>
+</FormTemplates>
+</file>
+
+<file path=customXml/item3.xml><?xml version="1.0" encoding="utf-8"?>
+<p:properties xmlns:p="http://schemas.microsoft.com/office/2006/metadata/properties" xmlns:xsi="http://www.w3.org/2001/XMLSchema-instance" xmlns:pc="http://schemas.microsoft.com/office/infopath/2007/PartnerControls">
+  <documentManagement/>
+</p:properties>
+</file>
+
 <file path=customXml/itemProps1.xml><?xml version="1.0" encoding="utf-8"?>
-<ds:datastoreItem xmlns:ds="http://schemas.openxmlformats.org/officeDocument/2006/customXml" ds:itemID="{15DFE7C8-44AE-4CA0-BC1C-D7A115A2224E}">
+<ds:datastoreItem xmlns:ds="http://schemas.openxmlformats.org/officeDocument/2006/customXml" ds:itemID="{FD1C29A1-C379-41A3-A695-3B889195B7A7}">
   <ds:schemaRefs>
+    <ds:schemaRef ds:uri="http://schemas.microsoft.com/office/2006/metadata/contentType"/>
+    <ds:schemaRef ds:uri="http://schemas.microsoft.com/office/2006/metadata/properties/metaAttributes"/>
+    <ds:schemaRef ds:uri="http://www.w3.org/2001/XMLSchema"/>
     <ds:schemaRef ds:uri="http://schemas.microsoft.com/office/2006/metadata/properties"/>
+    <ds:schemaRef ds:uri="c1ac3b6e-c3ea-4cbf-a06a-c0c6c6a25c6e"/>
+    <ds:schemaRef ds:uri="http://schemas.microsoft.com/office/2006/documentManagement/types"/>
     <ds:schemaRef ds:uri="http://schemas.microsoft.com/office/infopath/2007/PartnerControls"/>
+    <ds:schemaRef ds:uri="http://schemas.openxmlformats.org/package/2006/metadata/core-properties"/>
+    <ds:schemaRef ds:uri="http://purl.org/dc/elements/1.1/"/>
+    <ds:schemaRef ds:uri="http://purl.org/dc/terms/"/>
+    <ds:schemaRef ds:uri="http://schemas.microsoft.com/internal/obd"/>
   </ds:schemaRefs>
 </ds:datastoreItem>
 </file>
@@ -10638,5 +10659,10 @@
 </file>
 
 <file path=customXml/itemProps3.xml><?xml version="1.0" encoding="utf-8"?>
-<ds:datastoreItem xmlns:ds="http://schemas.openxmlformats.org/officeDocument/2006/customXml" ds:itemID="{FD1C29A1-C379-41A3-A695-3B889195B7A7}"/>
+<ds:datastoreItem xmlns:ds="http://schemas.openxmlformats.org/officeDocument/2006/customXml" ds:itemID="{15DFE7C8-44AE-4CA0-BC1C-D7A115A2224E}">
+  <ds:schemaRefs>
+    <ds:schemaRef ds:uri="http://schemas.microsoft.com/office/2006/metadata/properties"/>
+    <ds:schemaRef ds:uri="http://schemas.microsoft.com/office/infopath/2007/PartnerControls"/>
+  </ds:schemaRefs>
+</ds:datastoreItem>
 </file>